--- a/media/resources/BirOrunduuOnduktar/Onduktar_Boluu_1denAzKatanyTap.pptx
+++ b/media/resources/BirOrunduuOnduktar/Onduktar_Boluu_1denAzKatanyTap.pptx
@@ -6730,7 +6730,7 @@
                 <a:ea typeface="+mn-ea"/>
                 <a:cs typeface="+mn-cs"/>
               </a:rPr>
-              <a:t>Турдуу пикирлер учун ыраазычылык билдиребиз.</a:t>
+              <a:t>Турдуу пикирлер үчүн ыраазычылык билдиребиз.</a:t>
             </a:r>
           </a:p>
           <a:p>
